--- a/V6主副料採購_AI導入評估_20260908.pptx
+++ b/V6主副料採購_AI導入評估_20260908.pptx
@@ -4068,7 +4068,7 @@
                 <a:ea typeface="微軟正黑體"/>
                 <a:cs typeface="微軟正黑體"/>
               </a:rPr>
-              <a:t>AI 已經接手到哪裡 — 全部落在輸入端，沒有一項跨進判斷端</a:t>
+              <a:t>AI 已經接手到哪裡 — 全部落在輸入端，沒有一項能跨進判斷端</a:t>
             </a:r>
           </a:p>
         </p:txBody>
@@ -4144,7 +4144,7 @@
                 <a:ea typeface="微軟正黑體"/>
                 <a:cs typeface="微軟正黑體"/>
               </a:rPr>
-              <a:t>主採｜已導入 4 支 skill</a:t>
+              <a:t>主採｜已導入 5 支 skill</a:t>
             </a:r>
           </a:p>
         </p:txBody>
@@ -4158,7 +4158,7 @@
         <p:spPr>
           <a:xfrm>
             <a:off x="566928" y="1865376"/>
-            <a:ext cx="5349240" cy="2487168"/>
+            <a:ext cx="5349240" cy="2670048"/>
           </a:xfrm>
           <a:prstGeom prst="roundRect">
             <a:avLst/>
@@ -4189,7 +4189,7 @@
         <p:spPr>
           <a:xfrm>
             <a:off x="566928" y="1865376"/>
-            <a:ext cx="54864" cy="2487168"/>
+            <a:ext cx="54864" cy="2670048"/>
           </a:xfrm>
           <a:prstGeom prst="rect">
             <a:avLst/>
@@ -4579,7 +4579,97 @@
         </p:nvSpPr>
         <p:spPr>
           <a:xfrm>
-            <a:off x="804672" y="3419856"/>
+            <a:off x="804672" y="3328416"/>
+            <a:ext cx="2468880" cy="274320"/>
+          </a:xfrm>
+          <a:prstGeom prst="rect">
+            <a:avLst/>
+          </a:prstGeom>
+          <a:noFill/>
+        </p:spPr>
+        <p:txBody>
+          <a:bodyPr wrap="square" lIns="0" tIns="0" rIns="0" bIns="0" anchor="ctr"/>
+          <a:lstStyle/>
+          <a:p>
+            <a:pPr algn="l">
+              <a:lnSpc>
+                <a:spcPct val="118000"/>
+              </a:lnSpc>
+              <a:spcBef>
+                <a:spcPts val="0"/>
+              </a:spcBef>
+              <a:spcAft>
+                <a:spcPts val="0"/>
+              </a:spcAft>
+            </a:pPr>
+            <a:r>
+              <a:rPr lang="zh-TW" altLang="en-US" sz="1000" b="1" dirty="0">
+                <a:solidFill>
+                  <a:srgbClr val="1C4F8F"/>
+                </a:solidFill>
+                <a:latin typeface="微軟正黑體"/>
+                <a:ea typeface="微軟正黑體"/>
+                <a:cs typeface="微軟正黑體"/>
+              </a:rPr>
+              <a:t>· 海空運費比較 產出工具</a:t>
+            </a:r>
+          </a:p>
+        </p:txBody>
+      </p:sp>
+      <p:sp>
+        <p:nvSpPr>
+          <p:cNvPr id="18" name="TextBox 18"/>
+          <p:cNvSpPr txBox="1"/>
+          <p:nvPr/>
+        </p:nvSpPr>
+        <p:spPr>
+          <a:xfrm>
+            <a:off x="3346704" y="3328416"/>
+            <a:ext cx="2331720" cy="274320"/>
+          </a:xfrm>
+          <a:prstGeom prst="rect">
+            <a:avLst/>
+          </a:prstGeom>
+          <a:noFill/>
+        </p:spPr>
+        <p:txBody>
+          <a:bodyPr wrap="square" lIns="0" tIns="0" rIns="0" bIns="0" anchor="ctr"/>
+          <a:lstStyle/>
+          <a:p>
+            <a:pPr algn="l">
+              <a:lnSpc>
+                <a:spcPct val="118000"/>
+              </a:lnSpc>
+              <a:spcBef>
+                <a:spcPts val="0"/>
+              </a:spcBef>
+              <a:spcAft>
+                <a:spcPts val="0"/>
+              </a:spcAft>
+            </a:pPr>
+            <a:r>
+              <a:rPr lang="zh-TW" altLang="en-US" sz="950" b="0" dirty="0">
+                <a:solidFill>
+                  <a:srgbClr val="454441"/>
+                </a:solidFill>
+                <a:latin typeface="微軟正黑體"/>
+                <a:ea typeface="微軟正黑體"/>
+                <a:cs typeface="微軟正黑體"/>
+              </a:rPr>
+              <a:t>查詢海／空運報價，產出比較 Excel</a:t>
+            </a:r>
+          </a:p>
+        </p:txBody>
+      </p:sp>
+      <p:sp>
+        <p:nvSpPr>
+          <p:cNvPr id="19" name="TextBox 19"/>
+          <p:cNvSpPr txBox="1"/>
+          <p:nvPr/>
+        </p:nvSpPr>
+        <p:spPr>
+          <a:xfrm>
+            <a:off x="804672" y="3694176"/>
             <a:ext cx="4873752" cy="694944"/>
           </a:xfrm>
           <a:prstGeom prst="rect">
@@ -4611,14 +4701,14 @@
                 <a:ea typeface="微軟正黑體"/>
                 <a:cs typeface="微軟正黑體"/>
               </a:rPr>
-              <a:t>對應的三類合計約占 25% 的信件量；十四類加權後的 AI 可協助比例為 12.6%（該簡報自述約 10–15%）。</a:t>
-            </a:r>
-          </a:p>
-        </p:txBody>
-      </p:sp>
-      <p:sp>
-        <p:nvSpPr>
-          <p:cNvPr id="18" name="TextBox 18"/>
+              <a:t>對應的類別合計約占 25% 的信件量；十四類加權後的 AI 可協助比例為 12.6%（該簡報自述約 10–15%）。</a:t>
+            </a:r>
+          </a:p>
+        </p:txBody>
+      </p:sp>
+      <p:sp>
+        <p:nvSpPr>
+          <p:cNvPr id="20" name="TextBox 20"/>
           <p:cNvSpPr txBox="1"/>
           <p:nvPr/>
         </p:nvSpPr>
@@ -4663,14 +4753,14 @@
       </p:sp>
       <p:sp>
         <p:nvSpPr>
-          <p:cNvPr id="19" name="Shape 19"/>
+          <p:cNvPr id="21" name="Shape 21"/>
           <p:cNvSpPr/>
           <p:nvPr/>
         </p:nvSpPr>
         <p:spPr>
           <a:xfrm>
             <a:off x="6272784" y="1865376"/>
-            <a:ext cx="5349240" cy="2487168"/>
+            <a:ext cx="5349240" cy="2670048"/>
           </a:xfrm>
           <a:prstGeom prst="roundRect">
             <a:avLst/>
@@ -4694,14 +4784,14 @@
       </p:sp>
       <p:sp>
         <p:nvSpPr>
-          <p:cNvPr id="20" name="Shape 20"/>
+          <p:cNvPr id="22" name="Shape 22"/>
           <p:cNvSpPr/>
           <p:nvPr/>
         </p:nvSpPr>
         <p:spPr>
           <a:xfrm>
             <a:off x="6272784" y="1865376"/>
-            <a:ext cx="54864" cy="2487168"/>
+            <a:ext cx="54864" cy="2670048"/>
           </a:xfrm>
           <a:prstGeom prst="rect">
             <a:avLst/>
@@ -4725,7 +4815,7 @@
       </p:sp>
       <p:sp>
         <p:nvSpPr>
-          <p:cNvPr id="21" name="TextBox 21"/>
+          <p:cNvPr id="23" name="TextBox 23"/>
           <p:cNvSpPr txBox="1"/>
           <p:nvPr/>
         </p:nvSpPr>
@@ -4770,7 +4860,7 @@
       </p:sp>
       <p:sp>
         <p:nvSpPr>
-          <p:cNvPr id="22" name="TextBox 22"/>
+          <p:cNvPr id="24" name="TextBox 24"/>
           <p:cNvSpPr txBox="1"/>
           <p:nvPr/>
         </p:nvSpPr>
@@ -4815,7 +4905,7 @@
       </p:sp>
       <p:sp>
         <p:nvSpPr>
-          <p:cNvPr id="23" name="TextBox 23"/>
+          <p:cNvPr id="25" name="TextBox 25"/>
           <p:cNvSpPr txBox="1"/>
           <p:nvPr/>
         </p:nvSpPr>
@@ -4860,7 +4950,7 @@
       </p:sp>
       <p:sp>
         <p:nvSpPr>
-          <p:cNvPr id="24" name="TextBox 24"/>
+          <p:cNvPr id="26" name="TextBox 26"/>
           <p:cNvSpPr txBox="1"/>
           <p:nvPr/>
         </p:nvSpPr>
@@ -4905,7 +4995,7 @@
       </p:sp>
       <p:sp>
         <p:nvSpPr>
-          <p:cNvPr id="25" name="TextBox 25"/>
+          <p:cNvPr id="27" name="TextBox 27"/>
           <p:cNvSpPr txBox="1"/>
           <p:nvPr/>
         </p:nvSpPr>
@@ -4950,7 +5040,7 @@
       </p:sp>
       <p:sp>
         <p:nvSpPr>
-          <p:cNvPr id="26" name="TextBox 26"/>
+          <p:cNvPr id="28" name="TextBox 28"/>
           <p:cNvSpPr txBox="1"/>
           <p:nvPr/>
         </p:nvSpPr>
@@ -4995,7 +5085,7 @@
       </p:sp>
       <p:sp>
         <p:nvSpPr>
-          <p:cNvPr id="27" name="TextBox 27"/>
+          <p:cNvPr id="29" name="TextBox 29"/>
           <p:cNvSpPr txBox="1"/>
           <p:nvPr/>
         </p:nvSpPr>
@@ -5040,7 +5130,7 @@
       </p:sp>
       <p:sp>
         <p:nvSpPr>
-          <p:cNvPr id="28" name="TextBox 28"/>
+          <p:cNvPr id="30" name="TextBox 30"/>
           <p:cNvSpPr txBox="1"/>
           <p:nvPr/>
         </p:nvSpPr>
@@ -5085,13 +5175,13 @@
       </p:sp>
       <p:sp>
         <p:nvSpPr>
-          <p:cNvPr id="29" name="TextBox 29"/>
-          <p:cNvSpPr txBox="1"/>
-          <p:nvPr/>
-        </p:nvSpPr>
-        <p:spPr>
-          <a:xfrm>
-            <a:off x="6510528" y="3419856"/>
+          <p:cNvPr id="31" name="TextBox 31"/>
+          <p:cNvSpPr txBox="1"/>
+          <p:nvPr/>
+        </p:nvSpPr>
+        <p:spPr>
+          <a:xfrm>
+            <a:off x="6510528" y="3694176"/>
             <a:ext cx="4873752" cy="694944"/>
           </a:xfrm>
           <a:prstGeom prst="rect">
@@ -5130,13 +5220,13 @@
       </p:sp>
       <p:sp>
         <p:nvSpPr>
-          <p:cNvPr id="30" name="Shape 30"/>
+          <p:cNvPr id="32" name="Shape 32"/>
           <p:cNvSpPr/>
           <p:nvPr/>
         </p:nvSpPr>
         <p:spPr>
           <a:xfrm>
-            <a:off x="566928" y="4517136"/>
+            <a:off x="566928" y="4645152"/>
             <a:ext cx="11055096" cy="694944"/>
           </a:xfrm>
           <a:prstGeom prst="roundRect">
@@ -5161,13 +5251,13 @@
       </p:sp>
       <p:sp>
         <p:nvSpPr>
-          <p:cNvPr id="31" name="Shape 31"/>
+          <p:cNvPr id="33" name="Shape 33"/>
           <p:cNvSpPr/>
           <p:nvPr/>
         </p:nvSpPr>
         <p:spPr>
           <a:xfrm>
-            <a:off x="566928" y="4517136"/>
+            <a:off x="566928" y="4645152"/>
             <a:ext cx="54864" cy="694944"/>
           </a:xfrm>
           <a:prstGeom prst="rect">
@@ -5192,13 +5282,13 @@
       </p:sp>
       <p:sp>
         <p:nvSpPr>
-          <p:cNvPr id="32" name="TextBox 32"/>
-          <p:cNvSpPr txBox="1"/>
-          <p:nvPr/>
-        </p:nvSpPr>
-        <p:spPr>
-          <a:xfrm>
-            <a:off x="786384" y="4590288"/>
+          <p:cNvPr id="34" name="TextBox 34"/>
+          <p:cNvSpPr txBox="1"/>
+          <p:nvPr/>
+        </p:nvSpPr>
+        <p:spPr>
+          <a:xfrm>
+            <a:off x="786384" y="4718304"/>
             <a:ext cx="1874520" cy="219456"/>
           </a:xfrm>
           <a:prstGeom prst="rect">
@@ -5237,13 +5327,13 @@
       </p:sp>
       <p:sp>
         <p:nvSpPr>
-          <p:cNvPr id="33" name="TextBox 33"/>
-          <p:cNvSpPr txBox="1"/>
-          <p:nvPr/>
-        </p:nvSpPr>
-        <p:spPr>
-          <a:xfrm>
-            <a:off x="2761488" y="4590288"/>
+          <p:cNvPr id="35" name="TextBox 35"/>
+          <p:cNvSpPr txBox="1"/>
+          <p:nvPr/>
+        </p:nvSpPr>
+        <p:spPr>
+          <a:xfrm>
+            <a:off x="2761488" y="4718304"/>
             <a:ext cx="8641080" cy="566928"/>
           </a:xfrm>
           <a:prstGeom prst="rect">
@@ -5282,13 +5372,13 @@
       </p:sp>
       <p:sp>
         <p:nvSpPr>
-          <p:cNvPr id="34" name="Shape 34"/>
+          <p:cNvPr id="36" name="Shape 36"/>
           <p:cNvSpPr/>
           <p:nvPr/>
         </p:nvSpPr>
         <p:spPr>
           <a:xfrm>
-            <a:off x="566928" y="5394960"/>
+            <a:off x="566928" y="5705856"/>
             <a:ext cx="11055096" cy="530352"/>
           </a:xfrm>
           <a:prstGeom prst="roundRect">
@@ -5313,13 +5403,13 @@
       </p:sp>
       <p:sp>
         <p:nvSpPr>
-          <p:cNvPr id="35" name="Shape 35"/>
+          <p:cNvPr id="37" name="Shape 37"/>
           <p:cNvSpPr/>
           <p:nvPr/>
         </p:nvSpPr>
         <p:spPr>
           <a:xfrm>
-            <a:off x="566928" y="5394960"/>
+            <a:off x="566928" y="5705856"/>
             <a:ext cx="54864" cy="530352"/>
           </a:xfrm>
           <a:prstGeom prst="rect">
@@ -5344,13 +5434,13 @@
       </p:sp>
       <p:sp>
         <p:nvSpPr>
-          <p:cNvPr id="36" name="TextBox 36"/>
-          <p:cNvSpPr txBox="1"/>
-          <p:nvPr/>
-        </p:nvSpPr>
-        <p:spPr>
-          <a:xfrm>
-            <a:off x="786384" y="5422392"/>
+          <p:cNvPr id="38" name="TextBox 38"/>
+          <p:cNvSpPr txBox="1"/>
+          <p:nvPr/>
+        </p:nvSpPr>
+        <p:spPr>
+          <a:xfrm>
+            <a:off x="786384" y="5733288"/>
             <a:ext cx="10616184" cy="475488"/>
           </a:xfrm>
           <a:prstGeom prst="rect">
@@ -5393,7 +5483,7 @@
                 <a:ea typeface="微軟正黑體"/>
                 <a:cs typeface="微軟正黑體"/>
               </a:rPr>
-              <a:t>八個項目全部落在「比對與填入」；要不要覆蓋、算不算核可、報告能不能寄出，</a:t>
+              <a:t>九個項目全部落在「比對與填入」；要不要覆蓋、算不算核可、報告能不能寄出，</a:t>
             </a:r>
             <a:r>
               <a:rPr lang="zh-TW" altLang="en-US" sz="1300" b="1" dirty="0">
@@ -5422,7 +5512,7 @@
       </p:sp>
       <p:sp>
         <p:nvSpPr>
-          <p:cNvPr id="37" name="TextBox 37"/>
+          <p:cNvPr id="39" name="TextBox 39"/>
           <p:cNvSpPr txBox="1"/>
           <p:nvPr/>
         </p:nvSpPr>
@@ -5460,7 +5550,7 @@
                 <a:ea typeface="微軟正黑體"/>
                 <a:cs typeface="微軟正黑體"/>
               </a:rPr>
-              <a:t>資料來源：主採團隊現行 Claude Code skill 清單（bl-dyelot-check／ta-invoice-fill／gu-ta-orderqty-fill／gu-cbd-to-ta-tool）；V6副採工作範疇簡略說明（2026-09-07）工時特性頁。25%、40%、12.6% 均為依表列占比推算之估算值。</a:t>
+              <a:t>資料來源：主採團隊現行 Claude Code skill 清單（bl-dyelot-check／ta-invoice-fill／gu-ta-orderqty-fill／gu-cbd-to-ta-tool，另含海空運費比較產出工具）；V6副採工作範疇簡略說明（2026-09-07）工時特性頁。25%、40%、12.6% 均為依表列占比推算之估算值。</a:t>
             </a:r>
           </a:p>
         </p:txBody>

--- a/V6主副料採購_AI導入評估_20260908.pptx
+++ b/V6主副料採購_AI導入評估_20260908.pptx
@@ -949,7 +949,7 @@
                 <a:ea typeface="微軟正黑體"/>
                 <a:cs typeface="微軟正黑體"/>
               </a:rPr>
-              <a:t>6 位</a:t>
+              <a:t>10 位</a:t>
             </a:r>
           </a:p>
         </p:txBody>
@@ -994,7 +994,7 @@
                 <a:ea typeface="微軟正黑體"/>
                 <a:cs typeface="微軟正黑體"/>
               </a:rPr>
-              <a:t>人力編制（主採 3＋副採 3）</a:t>
+              <a:t>人力編制（主採 7＋副採 3）</a:t>
             </a:r>
           </a:p>
         </p:txBody>
@@ -3851,7 +3851,7 @@
                 <a:ea typeface="微軟正黑體"/>
                 <a:cs typeface="微軟正黑體"/>
               </a:rPr>
-              <a:t>主採最大的一類占 15%、副採最大的兩類各占 20% —— 沒有一塊大到值得整批自動化；而省下的 10–15% 散在六個人每天的 10–30 分鐘切片裡，</a:t>
+              <a:t>主採最大的一類占 15%、副採最大的兩類各占 20% —— 沒有一塊大到值得整批自動化；而省下的 10–15% 散在十個人每天的 10–30 分鐘切片裡，</a:t>
             </a:r>
             <a:r>
               <a:rPr lang="zh-TW" altLang="en-US" sz="1200" b="1" dirty="0">

--- a/V6主副料採購_AI導入評估_20260908.pptx
+++ b/V6主副料採購_AI導入評估_20260908.pptx
@@ -2519,7 +2519,7 @@
                 <a:ea typeface="微軟正黑體"/>
                 <a:cs typeface="微軟正黑體"/>
               </a:rPr>
-              <a:t>⚠ 別讀錯這兩個數字</a:t>
+              <a:t>⚠ 這兩個數字的定義</a:t>
             </a:r>
           </a:p>
         </p:txBody>
@@ -2787,7 +2787,7 @@
                 <a:ea typeface="微軟正黑體"/>
                 <a:cs typeface="微軟正黑體"/>
               </a:rPr>
-              <a:t>為什麼工時省得下來，人力卻減不掉 — 六個共通原因</a:t>
+              <a:t>為什麼工時省得下來，人力難以等比例縮減 — 六個共通原因</a:t>
             </a:r>
           </a:p>
         </p:txBody>
@@ -3862,7 +3862,7 @@
                 <a:ea typeface="微軟正黑體"/>
                 <a:cs typeface="微軟正黑體"/>
               </a:rPr>
-              <a:t>是等待中的空隙，不是可以整併掉的一個編制。</a:t>
+              <a:t>屬於等待中的零碎空隙，不易整併為可釋出的編制。</a:t>
             </a:r>
           </a:p>
         </p:txBody>
@@ -4014,7 +4014,7 @@
                 <a:ea typeface="微軟正黑體"/>
                 <a:cs typeface="微軟正黑體"/>
               </a:rPr>
-              <a:t>擴大結構化比對類工具的覆蓋；目標是把這 10–15% 的行政步驟做穩、降低 key-in 錯誤，而不是拿它折抵編制。</a:t>
+              <a:t>擴大結構化比對類工具的覆蓋；目標是把這 10–15% 的行政步驟做穩、降低 key-in 錯誤。</a:t>
             </a:r>
           </a:p>
         </p:txBody>
@@ -4121,7 +4121,7 @@
                 <a:ea typeface="微軟正黑體"/>
                 <a:cs typeface="微軟正黑體"/>
               </a:rPr>
-              <a:t>② 這幾類不納入 AI 取代規劃</a:t>
+              <a:t>② 這幾類建議維持現有人力</a:t>
             </a:r>
           </a:p>
         </p:txBody>
@@ -4166,7 +4166,7 @@
                 <a:ea typeface="微軟正黑體"/>
                 <a:cs typeface="微軟正黑體"/>
               </a:rPr>
-              <a:t>重大品質異常、議價協商（含匯率商談）、看色與核色判斷、跨廠催辦、跨國交涉 —— 維持現有人力配置。</a:t>
+              <a:t>重大品質異常、議價協商（含匯率商談）、看色與核色判斷、跨廠催辦、跨國交涉 —— 這些環節的判斷與責任仍需由人承擔。</a:t>
             </a:r>
           </a:p>
         </p:txBody>
@@ -4273,7 +4273,7 @@
                 <a:ea typeface="微軟正黑體"/>
                 <a:cs typeface="微軟正黑體"/>
               </a:rPr>
-              <a:t>③ 評估編制看量體，不看工具數</a:t>
+              <a:t>③ 評估編制以量體為準</a:t>
             </a:r>
           </a:p>
         </p:txBody>
@@ -4318,7 +4318,7 @@
                 <a:ea typeface="微軟正黑體"/>
                 <a:cs typeface="微軟正黑體"/>
               </a:rPr>
-              <a:t>日後若要評估人力，以款數／PO 張數／異常件數等量體指標判斷，而不是以導入了幾支 AI 工具判斷。</a:t>
+              <a:t>日後若要評估人力，建議以款數／PO 張數／異常件數等量體指標作為主要依據。</a:t>
             </a:r>
           </a:p>
         </p:txBody>
@@ -4363,7 +4363,7 @@
                 <a:ea typeface="微軟正黑體"/>
                 <a:cs typeface="微軟正黑體"/>
               </a:rPr>
-              <a:t>結論：AI 是協作者，不是替代人力的方案 —— 它撐住的是產能，不是騰出的編制。｜資料來源：主採業務範疇說明（2026-09-07）、V6副採工作範疇簡略說明（2026-09-07）。占比皆為估算值、非工時實測，正式引用前請主採／副採本人及主管複核。</a:t>
+              <a:t>結論：AI 定位為協作工具，主要效益在支撐產能而非釋出編制。｜資料來源：主採業務範疇說明（2026-09-07）、V6副採工作範疇簡略說明（2026-09-07）。占比皆為估算值、非工時實測，正式引用前請主採／副採本人及主管複核。</a:t>
             </a:r>
           </a:p>
         </p:txBody>
